--- a/eCatalog_Agent_Architecture.pptx
+++ b/eCatalog_Agent_Architecture.pptx
@@ -3104,8 +3104,8 @@
         </p:nvSpPr>
         <p:spPr>
           <a:xfrm>
-            <a:off x="457200" y="137160"/>
-            <a:ext cx="11274552" cy="457200"/>
+            <a:off x="274320" y="45720"/>
+            <a:ext cx="11640312" cy="384048"/>
           </a:xfrm>
           <a:prstGeom prst="rect">
             <a:avLst/>
@@ -3113,47 +3113,2951 @@
           <a:noFill/>
         </p:spPr>
         <p:txBody>
-          <a:bodyPr wrap="none">
+          <a:bodyPr wrap="none" anchor="ctr">
             <a:spAutoFit/>
           </a:bodyPr>
           <a:lstStyle/>
           <a:p>
             <a:pPr algn="ctr"/>
             <a:r>
-              <a:rPr sz="2000" b="1">
+              <a:rPr sz="1800" b="1">
                 <a:solidFill>
                   <a:srgbClr val="1A1A2E"/>
                 </a:solidFill>
               </a:rPr>
-              <a:t>eCatalog Agent — 시스템 아키텍처</a:t>
-            </a:r>
-          </a:p>
-        </p:txBody>
-      </p:sp>
-      <p:pic>
-        <p:nvPicPr>
-          <p:cNvPr id="3" name="Picture 2" descr="diagram.png"/>
-          <p:cNvPicPr>
-            <a:picLocks noChangeAspect="1"/>
-          </p:cNvPicPr>
+              <a:t>eCatalog Agent  —  시스템 아키텍처</a:t>
+            </a:r>
+          </a:p>
+        </p:txBody>
+      </p:sp>
+      <p:sp>
+        <p:nvSpPr>
+          <p:cNvPr id="3" name="Rectangle 2"/>
+          <p:cNvSpPr/>
           <p:nvPr/>
-        </p:nvPicPr>
-        <p:blipFill>
-          <a:blip r:embed="rId2"/>
-          <a:stretch>
-            <a:fillRect/>
-          </a:stretch>
-        </p:blipFill>
-        <p:spPr>
-          <a:xfrm>
-            <a:off x="274320" y="685800"/>
-            <a:ext cx="11640312" cy="5943600"/>
+        </p:nvSpPr>
+        <p:spPr>
+          <a:xfrm>
+            <a:off x="274320" y="502920"/>
+            <a:ext cx="5760720" cy="914400"/>
           </a:xfrm>
           <a:prstGeom prst="rect">
             <a:avLst/>
           </a:prstGeom>
-        </p:spPr>
-      </p:pic>
+          <a:solidFill>
+            <a:srgbClr val="EBF5FB"/>
+          </a:solidFill>
+          <a:ln w="15240">
+            <a:solidFill>
+              <a:srgbClr val="3498DB"/>
+            </a:solidFill>
+            <a:prstDash val="dash"/>
+          </a:ln>
+        </p:spPr>
+        <p:style>
+          <a:lnRef idx="1">
+            <a:schemeClr val="accent1"/>
+          </a:lnRef>
+          <a:fillRef idx="3">
+            <a:schemeClr val="accent1"/>
+          </a:fillRef>
+          <a:effectRef idx="2">
+            <a:schemeClr val="accent1"/>
+          </a:effectRef>
+          <a:fontRef idx="minor">
+            <a:schemeClr val="lt1"/>
+          </a:fontRef>
+        </p:style>
+        <p:txBody>
+          <a:bodyPr rtlCol="0" anchor="ctr"/>
+          <a:lstStyle/>
+          <a:p>
+            <a:pPr algn="ctr"/>
+          </a:p>
+        </p:txBody>
+      </p:sp>
+      <p:sp>
+        <p:nvSpPr>
+          <p:cNvPr id="4" name="TextBox 3"/>
+          <p:cNvSpPr txBox="1"/>
+          <p:nvPr/>
+        </p:nvSpPr>
+        <p:spPr>
+          <a:xfrm>
+            <a:off x="438912" y="521207"/>
+            <a:ext cx="2743200" cy="201168"/>
+          </a:xfrm>
+          <a:prstGeom prst="rect">
+            <a:avLst/>
+          </a:prstGeom>
+          <a:noFill/>
+        </p:spPr>
+        <p:txBody>
+          <a:bodyPr wrap="none" anchor="ctr">
+            <a:spAutoFit/>
+          </a:bodyPr>
+          <a:lstStyle/>
+          <a:p>
+            <a:pPr algn="ctr"/>
+            <a:r>
+              <a:rPr sz="800" b="1">
+                <a:solidFill>
+                  <a:srgbClr val="1A6FA8"/>
+                </a:solidFill>
+              </a:rPr>
+              <a:t>Streamlit UI</a:t>
+            </a:r>
+          </a:p>
+        </p:txBody>
+      </p:sp>
+      <p:sp>
+        <p:nvSpPr>
+          <p:cNvPr id="5" name="Rounded Rectangle 4"/>
+          <p:cNvSpPr/>
+          <p:nvPr/>
+        </p:nvSpPr>
+        <p:spPr>
+          <a:xfrm>
+            <a:off x="457200" y="621792"/>
+            <a:ext cx="2560320" cy="713232"/>
+          </a:xfrm>
+          <a:prstGeom prst="roundRect">
+            <a:avLst/>
+          </a:prstGeom>
+          <a:solidFill>
+            <a:srgbClr val="D6EAF8"/>
+          </a:solidFill>
+          <a:ln w="19050">
+            <a:solidFill>
+              <a:srgbClr val="3498DB"/>
+            </a:solidFill>
+          </a:ln>
+        </p:spPr>
+        <p:style>
+          <a:lnRef idx="1">
+            <a:schemeClr val="accent1"/>
+          </a:lnRef>
+          <a:fillRef idx="3">
+            <a:schemeClr val="accent1"/>
+          </a:fillRef>
+          <a:effectRef idx="2">
+            <a:schemeClr val="accent1"/>
+          </a:effectRef>
+          <a:fontRef idx="minor">
+            <a:schemeClr val="lt1"/>
+          </a:fontRef>
+        </p:style>
+        <p:txBody>
+          <a:bodyPr rtlCol="0" anchor="ctr" wrap="square"/>
+          <a:lstStyle/>
+          <a:p>
+            <a:pPr algn="ctr">
+              <a:spcBef>
+                <a:spcPts val="100"/>
+              </a:spcBef>
+              <a:spcAft>
+                <a:spcPts val="100"/>
+              </a:spcAft>
+            </a:pPr>
+            <a:r>
+              <a:rPr sz="800" b="1">
+                <a:solidFill>
+                  <a:srgbClr val="1A5E7A"/>
+                </a:solidFill>
+              </a:rPr>
+              <a:t>INPUT</a:t>
+            </a:r>
+          </a:p>
+          <a:p>
+            <a:pPr algn="ctr">
+              <a:spcBef>
+                <a:spcPts val="100"/>
+              </a:spcBef>
+              <a:spcAft>
+                <a:spcPts val="100"/>
+              </a:spcAft>
+            </a:pPr>
+            <a:r>
+              <a:rPr sz="900" b="1">
+                <a:solidFill>
+                  <a:srgbClr val="1A1A2E"/>
+                </a:solidFill>
+              </a:rPr>
+              <a:t>시스템 데이터 업로드</a:t>
+            </a:r>
+          </a:p>
+          <a:p>
+            <a:pPr algn="ctr">
+              <a:spcBef>
+                <a:spcPts val="100"/>
+              </a:spcBef>
+              <a:spcAft>
+                <a:spcPts val="100"/>
+              </a:spcAft>
+            </a:pPr>
+            <a:r>
+              <a:rPr sz="700" b="0">
+                <a:solidFill>
+                  <a:srgbClr val="555555"/>
+                </a:solidFill>
+              </a:rPr>
+              <a:t>system_data / pdf_mapping</a:t>
+            </a:r>
+          </a:p>
+        </p:txBody>
+      </p:sp>
+      <p:cxnSp>
+        <p:nvCxnSpPr>
+          <p:cNvPr id="6" name="Connector 5"/>
+          <p:cNvCxnSpPr/>
+          <p:nvPr/>
+        </p:nvCxnSpPr>
+        <p:spPr>
+          <a:xfrm>
+            <a:off x="3063240" y="978408"/>
+            <a:ext cx="457200" cy="0"/>
+          </a:xfrm>
+          <a:prstGeom prst="line">
+            <a:avLst/>
+          </a:prstGeom>
+          <a:ln w="19050">
+            <a:solidFill>
+              <a:srgbClr val="888888"/>
+            </a:solidFill>
+            <a:tailEnd type="arrow" w="med" len="med"/>
+          </a:ln>
+        </p:spPr>
+        <p:style>
+          <a:lnRef idx="2">
+            <a:schemeClr val="accent1"/>
+          </a:lnRef>
+          <a:fillRef idx="0">
+            <a:schemeClr val="accent1"/>
+          </a:fillRef>
+          <a:effectRef idx="1">
+            <a:schemeClr val="accent1"/>
+          </a:effectRef>
+          <a:fontRef idx="minor">
+            <a:schemeClr val="tx1"/>
+          </a:fontRef>
+        </p:style>
+      </p:cxnSp>
+      <p:sp>
+        <p:nvSpPr>
+          <p:cNvPr id="7" name="Rounded Rectangle 6"/>
+          <p:cNvSpPr/>
+          <p:nvPr/>
+        </p:nvSpPr>
+        <p:spPr>
+          <a:xfrm>
+            <a:off x="3566160" y="621792"/>
+            <a:ext cx="2286000" cy="713232"/>
+          </a:xfrm>
+          <a:prstGeom prst="roundRect">
+            <a:avLst/>
+          </a:prstGeom>
+          <a:solidFill>
+            <a:srgbClr val="D6EAF8"/>
+          </a:solidFill>
+          <a:ln w="19050">
+            <a:solidFill>
+              <a:srgbClr val="3498DB"/>
+            </a:solidFill>
+          </a:ln>
+        </p:spPr>
+        <p:style>
+          <a:lnRef idx="1">
+            <a:schemeClr val="accent1"/>
+          </a:lnRef>
+          <a:fillRef idx="3">
+            <a:schemeClr val="accent1"/>
+          </a:fillRef>
+          <a:effectRef idx="2">
+            <a:schemeClr val="accent1"/>
+          </a:effectRef>
+          <a:fontRef idx="minor">
+            <a:schemeClr val="lt1"/>
+          </a:fontRef>
+        </p:style>
+        <p:txBody>
+          <a:bodyPr rtlCol="0" anchor="ctr" wrap="square"/>
+          <a:lstStyle/>
+          <a:p>
+            <a:pPr algn="ctr">
+              <a:spcBef>
+                <a:spcPts val="100"/>
+              </a:spcBef>
+              <a:spcAft>
+                <a:spcPts val="100"/>
+              </a:spcAft>
+            </a:pPr>
+            <a:r>
+              <a:rPr sz="800" b="1">
+                <a:solidFill>
+                  <a:srgbClr val="1A5E7A"/>
+                </a:solidFill>
+              </a:rPr>
+              <a:t>LIST</a:t>
+            </a:r>
+          </a:p>
+          <a:p>
+            <a:pPr algn="ctr">
+              <a:spcBef>
+                <a:spcPts val="100"/>
+              </a:spcBef>
+              <a:spcAft>
+                <a:spcPts val="100"/>
+              </a:spcAft>
+            </a:pPr>
+            <a:r>
+              <a:rPr sz="900" b="1">
+                <a:solidFill>
+                  <a:srgbClr val="1A1A2E"/>
+                </a:solidFill>
+              </a:rPr>
+              <a:t>Q코드 목록</a:t>
+            </a:r>
+          </a:p>
+          <a:p>
+            <a:pPr algn="ctr">
+              <a:spcBef>
+                <a:spcPts val="100"/>
+              </a:spcBef>
+              <a:spcAft>
+                <a:spcPts val="100"/>
+              </a:spcAft>
+            </a:pPr>
+            <a:r>
+              <a:rPr sz="700" b="0">
+                <a:solidFill>
+                  <a:srgbClr val="555555"/>
+                </a:solidFill>
+              </a:rPr>
+              <a:t>PDF·URL 있는 항목  |  앞7+뒤7</a:t>
+            </a:r>
+          </a:p>
+        </p:txBody>
+      </p:sp>
+      <p:cxnSp>
+        <p:nvCxnSpPr>
+          <p:cNvPr id="8" name="Connector 7"/>
+          <p:cNvCxnSpPr/>
+          <p:nvPr/>
+        </p:nvCxnSpPr>
+        <p:spPr>
+          <a:xfrm>
+            <a:off x="6094476" y="1444752"/>
+            <a:ext cx="0" cy="182880"/>
+          </a:xfrm>
+          <a:prstGeom prst="line">
+            <a:avLst/>
+          </a:prstGeom>
+          <a:ln w="19050">
+            <a:solidFill>
+              <a:srgbClr val="888888"/>
+            </a:solidFill>
+            <a:tailEnd type="arrow" w="med" len="med"/>
+          </a:ln>
+        </p:spPr>
+        <p:style>
+          <a:lnRef idx="2">
+            <a:schemeClr val="accent1"/>
+          </a:lnRef>
+          <a:fillRef idx="0">
+            <a:schemeClr val="accent1"/>
+          </a:fillRef>
+          <a:effectRef idx="1">
+            <a:schemeClr val="accent1"/>
+          </a:effectRef>
+          <a:fontRef idx="minor">
+            <a:schemeClr val="tx1"/>
+          </a:fontRef>
+        </p:style>
+      </p:cxnSp>
+      <p:sp>
+        <p:nvSpPr>
+          <p:cNvPr id="9" name="Rounded Rectangle 8"/>
+          <p:cNvSpPr/>
+          <p:nvPr/>
+        </p:nvSpPr>
+        <p:spPr>
+          <a:xfrm>
+            <a:off x="3959352" y="1664208"/>
+            <a:ext cx="4270248" cy="713232"/>
+          </a:xfrm>
+          <a:prstGeom prst="roundRect">
+            <a:avLst/>
+          </a:prstGeom>
+          <a:solidFill>
+            <a:srgbClr val="D1F2EB"/>
+          </a:solidFill>
+          <a:ln w="19050">
+            <a:solidFill>
+              <a:srgbClr val="1ABC9C"/>
+            </a:solidFill>
+          </a:ln>
+        </p:spPr>
+        <p:style>
+          <a:lnRef idx="1">
+            <a:schemeClr val="accent1"/>
+          </a:lnRef>
+          <a:fillRef idx="3">
+            <a:schemeClr val="accent1"/>
+          </a:fillRef>
+          <a:effectRef idx="2">
+            <a:schemeClr val="accent1"/>
+          </a:effectRef>
+          <a:fontRef idx="minor">
+            <a:schemeClr val="lt1"/>
+          </a:fontRef>
+        </p:style>
+        <p:txBody>
+          <a:bodyPr rtlCol="0" anchor="ctr" wrap="square"/>
+          <a:lstStyle/>
+          <a:p>
+            <a:pPr algn="ctr">
+              <a:spcBef>
+                <a:spcPts val="100"/>
+              </a:spcBef>
+              <a:spcAft>
+                <a:spcPts val="100"/>
+              </a:spcAft>
+            </a:pPr>
+            <a:r>
+              <a:rPr sz="800" b="1">
+                <a:solidFill>
+                  <a:srgbClr val="0E6B5B"/>
+                </a:solidFill>
+              </a:rPr>
+              <a:t>CONTEXT</a:t>
+            </a:r>
+          </a:p>
+          <a:p>
+            <a:pPr algn="ctr">
+              <a:spcBef>
+                <a:spcPts val="100"/>
+              </a:spcBef>
+              <a:spcAft>
+                <a:spcPts val="100"/>
+              </a:spcAft>
+            </a:pPr>
+            <a:r>
+              <a:rPr sz="900" b="1">
+                <a:solidFill>
+                  <a:srgbClr val="1A1A2E"/>
+                </a:solidFill>
+              </a:rPr>
+              <a:t>QcodeContext 수집</a:t>
+            </a:r>
+          </a:p>
+          <a:p>
+            <a:pPr algn="ctr">
+              <a:spcBef>
+                <a:spcPts val="100"/>
+              </a:spcBef>
+              <a:spcAft>
+                <a:spcPts val="100"/>
+              </a:spcAft>
+            </a:pPr>
+            <a:r>
+              <a:rPr sz="700" b="0">
+                <a:solidFill>
+                  <a:srgbClr val="444444"/>
+                </a:solidFill>
+              </a:rPr>
+              <a:t>PDF 텍스트(PyMuPDF)  ·  URL  ·  사양값  ·  메이커명</a:t>
+            </a:r>
+          </a:p>
+        </p:txBody>
+      </p:sp>
+      <p:cxnSp>
+        <p:nvCxnSpPr>
+          <p:cNvPr id="10" name="Connector 9"/>
+          <p:cNvCxnSpPr/>
+          <p:nvPr/>
+        </p:nvCxnSpPr>
+        <p:spPr>
+          <a:xfrm>
+            <a:off x="6094476" y="2423160"/>
+            <a:ext cx="0" cy="155448"/>
+          </a:xfrm>
+          <a:prstGeom prst="line">
+            <a:avLst/>
+          </a:prstGeom>
+          <a:ln w="19050">
+            <a:solidFill>
+              <a:srgbClr val="888888"/>
+            </a:solidFill>
+            <a:tailEnd type="arrow" w="med" len="med"/>
+          </a:ln>
+        </p:spPr>
+        <p:style>
+          <a:lnRef idx="2">
+            <a:schemeClr val="accent1"/>
+          </a:lnRef>
+          <a:fillRef idx="0">
+            <a:schemeClr val="accent1"/>
+          </a:fillRef>
+          <a:effectRef idx="1">
+            <a:schemeClr val="accent1"/>
+          </a:effectRef>
+          <a:fontRef idx="minor">
+            <a:schemeClr val="tx1"/>
+          </a:fontRef>
+        </p:style>
+      </p:cxnSp>
+      <p:sp>
+        <p:nvSpPr>
+          <p:cNvPr id="11" name="Rectangle 10"/>
+          <p:cNvSpPr/>
+          <p:nvPr/>
+        </p:nvSpPr>
+        <p:spPr>
+          <a:xfrm>
+            <a:off x="274320" y="2606040"/>
+            <a:ext cx="11640312" cy="841248"/>
+          </a:xfrm>
+          <a:prstGeom prst="rect">
+            <a:avLst/>
+          </a:prstGeom>
+          <a:solidFill>
+            <a:srgbClr val="FFFDF0"/>
+          </a:solidFill>
+          <a:ln w="15240">
+            <a:solidFill>
+              <a:srgbClr val="F39C12"/>
+            </a:solidFill>
+            <a:prstDash val="dash"/>
+          </a:ln>
+        </p:spPr>
+        <p:style>
+          <a:lnRef idx="1">
+            <a:schemeClr val="accent1"/>
+          </a:lnRef>
+          <a:fillRef idx="3">
+            <a:schemeClr val="accent1"/>
+          </a:fillRef>
+          <a:effectRef idx="2">
+            <a:schemeClr val="accent1"/>
+          </a:effectRef>
+          <a:fontRef idx="minor">
+            <a:schemeClr val="lt1"/>
+          </a:fontRef>
+        </p:style>
+        <p:txBody>
+          <a:bodyPr rtlCol="0" anchor="ctr"/>
+          <a:lstStyle/>
+          <a:p>
+            <a:pPr algn="ctr"/>
+          </a:p>
+        </p:txBody>
+      </p:sp>
+      <p:sp>
+        <p:nvSpPr>
+          <p:cNvPr id="12" name="TextBox 11"/>
+          <p:cNvSpPr txBox="1"/>
+          <p:nvPr/>
+        </p:nvSpPr>
+        <p:spPr>
+          <a:xfrm>
+            <a:off x="438912" y="2624328"/>
+            <a:ext cx="4572000" cy="201168"/>
+          </a:xfrm>
+          <a:prstGeom prst="rect">
+            <a:avLst/>
+          </a:prstGeom>
+          <a:noFill/>
+        </p:spPr>
+        <p:txBody>
+          <a:bodyPr wrap="none" anchor="ctr">
+            <a:spAutoFit/>
+          </a:bodyPr>
+          <a:lstStyle/>
+          <a:p>
+            <a:pPr algn="ctr"/>
+            <a:r>
+              <a:rPr sz="800" b="1">
+                <a:solidFill>
+                  <a:srgbClr val="B7770E"/>
+                </a:solidFill>
+              </a:rPr>
+              <a:t>ThreadPoolExecutor  (병렬 실행)</a:t>
+            </a:r>
+          </a:p>
+        </p:txBody>
+      </p:sp>
+      <p:sp>
+        <p:nvSpPr>
+          <p:cNvPr id="13" name="Rounded Rectangle 12"/>
+          <p:cNvSpPr/>
+          <p:nvPr/>
+        </p:nvSpPr>
+        <p:spPr>
+          <a:xfrm>
+            <a:off x="457200" y="2770632"/>
+            <a:ext cx="3566160" cy="594360"/>
+          </a:xfrm>
+          <a:prstGeom prst="roundRect">
+            <a:avLst/>
+          </a:prstGeom>
+          <a:solidFill>
+            <a:srgbClr val="FEF9E7"/>
+          </a:solidFill>
+          <a:ln w="19050">
+            <a:solidFill>
+              <a:srgbClr val="F39C12"/>
+            </a:solidFill>
+          </a:ln>
+        </p:spPr>
+        <p:style>
+          <a:lnRef idx="1">
+            <a:schemeClr val="accent1"/>
+          </a:lnRef>
+          <a:fillRef idx="3">
+            <a:schemeClr val="accent1"/>
+          </a:fillRef>
+          <a:effectRef idx="2">
+            <a:schemeClr val="accent1"/>
+          </a:effectRef>
+          <a:fontRef idx="minor">
+            <a:schemeClr val="lt1"/>
+          </a:fontRef>
+        </p:style>
+        <p:txBody>
+          <a:bodyPr rtlCol="0" anchor="ctr" wrap="square"/>
+          <a:lstStyle/>
+          <a:p>
+            <a:pPr algn="ctr">
+              <a:spcBef>
+                <a:spcPts val="100"/>
+              </a:spcBef>
+              <a:spcAft>
+                <a:spcPts val="100"/>
+              </a:spcAft>
+            </a:pPr>
+            <a:r>
+              <a:rPr sz="900" b="1">
+                <a:solidFill>
+                  <a:srgbClr val="1A1A2E"/>
+                </a:solidFill>
+              </a:rPr>
+              <a:t>메이커 검증</a:t>
+            </a:r>
+          </a:p>
+          <a:p>
+            <a:pPr algn="ctr">
+              <a:spcBef>
+                <a:spcPts val="100"/>
+              </a:spcBef>
+              <a:spcAft>
+                <a:spcPts val="100"/>
+              </a:spcAft>
+            </a:pPr>
+            <a:r>
+              <a:rPr sz="700" b="0">
+                <a:solidFill>
+                  <a:srgbClr val="665544"/>
+                </a:solidFill>
+              </a:rPr>
+              <a:t>verify_manufacturer()  |  maker_catalog_hints</a:t>
+            </a:r>
+          </a:p>
+        </p:txBody>
+      </p:sp>
+      <p:sp>
+        <p:nvSpPr>
+          <p:cNvPr id="14" name="Rounded Rectangle 13"/>
+          <p:cNvSpPr/>
+          <p:nvPr/>
+        </p:nvSpPr>
+        <p:spPr>
+          <a:xfrm>
+            <a:off x="4315968" y="2770632"/>
+            <a:ext cx="3566160" cy="594360"/>
+          </a:xfrm>
+          <a:prstGeom prst="roundRect">
+            <a:avLst/>
+          </a:prstGeom>
+          <a:solidFill>
+            <a:srgbClr val="FEF9E7"/>
+          </a:solidFill>
+          <a:ln w="19050">
+            <a:solidFill>
+              <a:srgbClr val="F39C12"/>
+            </a:solidFill>
+          </a:ln>
+        </p:spPr>
+        <p:style>
+          <a:lnRef idx="1">
+            <a:schemeClr val="accent1"/>
+          </a:lnRef>
+          <a:fillRef idx="3">
+            <a:schemeClr val="accent1"/>
+          </a:fillRef>
+          <a:effectRef idx="2">
+            <a:schemeClr val="accent1"/>
+          </a:effectRef>
+          <a:fontRef idx="minor">
+            <a:schemeClr val="lt1"/>
+          </a:fontRef>
+        </p:style>
+        <p:txBody>
+          <a:bodyPr rtlCol="0" anchor="ctr" wrap="square"/>
+          <a:lstStyle/>
+          <a:p>
+            <a:pPr algn="ctr">
+              <a:spcBef>
+                <a:spcPts val="100"/>
+              </a:spcBef>
+              <a:spcAft>
+                <a:spcPts val="100"/>
+              </a:spcAft>
+            </a:pPr>
+            <a:r>
+              <a:rPr sz="900" b="1">
+                <a:solidFill>
+                  <a:srgbClr val="1A1A2E"/>
+                </a:solidFill>
+              </a:rPr>
+              <a:t>웹 검색</a:t>
+            </a:r>
+          </a:p>
+          <a:p>
+            <a:pPr algn="ctr">
+              <a:spcBef>
+                <a:spcPts val="100"/>
+              </a:spcBef>
+              <a:spcAft>
+                <a:spcPts val="100"/>
+              </a:spcAft>
+            </a:pPr>
+            <a:r>
+              <a:rPr sz="700" b="0">
+                <a:solidFill>
+                  <a:srgbClr val="665544"/>
+                </a:solidFill>
+              </a:rPr>
+              <a:t>web_searcher  (timeout 6s)</a:t>
+            </a:r>
+          </a:p>
+        </p:txBody>
+      </p:sp>
+      <p:sp>
+        <p:nvSpPr>
+          <p:cNvPr id="15" name="Rounded Rectangle 14"/>
+          <p:cNvSpPr/>
+          <p:nvPr/>
+        </p:nvSpPr>
+        <p:spPr>
+          <a:xfrm>
+            <a:off x="8165592" y="2770632"/>
+            <a:ext cx="3566160" cy="594360"/>
+          </a:xfrm>
+          <a:prstGeom prst="roundRect">
+            <a:avLst/>
+          </a:prstGeom>
+          <a:solidFill>
+            <a:srgbClr val="FEF9E7"/>
+          </a:solidFill>
+          <a:ln w="19050">
+            <a:solidFill>
+              <a:srgbClr val="F39C12"/>
+            </a:solidFill>
+          </a:ln>
+        </p:spPr>
+        <p:style>
+          <a:lnRef idx="1">
+            <a:schemeClr val="accent1"/>
+          </a:lnRef>
+          <a:fillRef idx="3">
+            <a:schemeClr val="accent1"/>
+          </a:fillRef>
+          <a:effectRef idx="2">
+            <a:schemeClr val="accent1"/>
+          </a:effectRef>
+          <a:fontRef idx="minor">
+            <a:schemeClr val="lt1"/>
+          </a:fontRef>
+        </p:style>
+        <p:txBody>
+          <a:bodyPr rtlCol="0" anchor="ctr" wrap="square"/>
+          <a:lstStyle/>
+          <a:p>
+            <a:pPr algn="ctr">
+              <a:spcBef>
+                <a:spcPts val="100"/>
+              </a:spcBef>
+              <a:spcAft>
+                <a:spcPts val="100"/>
+              </a:spcAft>
+            </a:pPr>
+            <a:r>
+              <a:rPr sz="900" b="1">
+                <a:solidFill>
+                  <a:srgbClr val="1A1A2E"/>
+                </a:solidFill>
+              </a:rPr>
+              <a:t>URL 스펙 추출</a:t>
+            </a:r>
+          </a:p>
+          <a:p>
+            <a:pPr algn="ctr">
+              <a:spcBef>
+                <a:spcPts val="100"/>
+              </a:spcBef>
+              <a:spcAft>
+                <a:spcPts val="100"/>
+              </a:spcAft>
+            </a:pPr>
+            <a:r>
+              <a:rPr sz="700" b="0">
+                <a:solidFill>
+                  <a:srgbClr val="665544"/>
+                </a:solidFill>
+              </a:rPr>
+              <a:t>url_spec_fetcher  (timeout 8s)</a:t>
+            </a:r>
+          </a:p>
+        </p:txBody>
+      </p:sp>
+      <p:cxnSp>
+        <p:nvCxnSpPr>
+          <p:cNvPr id="16" name="Connector 15"/>
+          <p:cNvCxnSpPr/>
+          <p:nvPr/>
+        </p:nvCxnSpPr>
+        <p:spPr>
+          <a:xfrm>
+            <a:off x="6094476" y="3493008"/>
+            <a:ext cx="0" cy="155448"/>
+          </a:xfrm>
+          <a:prstGeom prst="line">
+            <a:avLst/>
+          </a:prstGeom>
+          <a:ln w="19050">
+            <a:solidFill>
+              <a:srgbClr val="888888"/>
+            </a:solidFill>
+            <a:tailEnd type="arrow" w="med" len="med"/>
+          </a:ln>
+        </p:spPr>
+        <p:style>
+          <a:lnRef idx="2">
+            <a:schemeClr val="accent1"/>
+          </a:lnRef>
+          <a:fillRef idx="0">
+            <a:schemeClr val="accent1"/>
+          </a:fillRef>
+          <a:effectRef idx="1">
+            <a:schemeClr val="accent1"/>
+          </a:effectRef>
+          <a:fontRef idx="minor">
+            <a:schemeClr val="tx1"/>
+          </a:fontRef>
+        </p:style>
+      </p:cxnSp>
+      <p:sp>
+        <p:nvSpPr>
+          <p:cNvPr id="17" name="Rectangle 16"/>
+          <p:cNvSpPr/>
+          <p:nvPr/>
+        </p:nvSpPr>
+        <p:spPr>
+          <a:xfrm>
+            <a:off x="274320" y="3675887"/>
+            <a:ext cx="11640312" cy="1417320"/>
+          </a:xfrm>
+          <a:prstGeom prst="rect">
+            <a:avLst/>
+          </a:prstGeom>
+          <a:solidFill>
+            <a:srgbClr val="EAF9F1"/>
+          </a:solidFill>
+          <a:ln w="15240">
+            <a:solidFill>
+              <a:srgbClr val="27AE60"/>
+            </a:solidFill>
+            <a:prstDash val="dash"/>
+          </a:ln>
+        </p:spPr>
+        <p:style>
+          <a:lnRef idx="1">
+            <a:schemeClr val="accent1"/>
+          </a:lnRef>
+          <a:fillRef idx="3">
+            <a:schemeClr val="accent1"/>
+          </a:fillRef>
+          <a:effectRef idx="2">
+            <a:schemeClr val="accent1"/>
+          </a:effectRef>
+          <a:fontRef idx="minor">
+            <a:schemeClr val="lt1"/>
+          </a:fontRef>
+        </p:style>
+        <p:txBody>
+          <a:bodyPr rtlCol="0" anchor="ctr"/>
+          <a:lstStyle/>
+          <a:p>
+            <a:pPr algn="ctr"/>
+          </a:p>
+        </p:txBody>
+      </p:sp>
+      <p:sp>
+        <p:nvSpPr>
+          <p:cNvPr id="18" name="TextBox 17"/>
+          <p:cNvSpPr txBox="1"/>
+          <p:nvPr/>
+        </p:nvSpPr>
+        <p:spPr>
+          <a:xfrm>
+            <a:off x="438912" y="3694176"/>
+            <a:ext cx="3657600" cy="201168"/>
+          </a:xfrm>
+          <a:prstGeom prst="rect">
+            <a:avLst/>
+          </a:prstGeom>
+          <a:noFill/>
+        </p:spPr>
+        <p:txBody>
+          <a:bodyPr wrap="none" anchor="ctr">
+            <a:spAutoFit/>
+          </a:bodyPr>
+          <a:lstStyle/>
+          <a:p>
+            <a:pPr algn="ctr"/>
+            <a:r>
+              <a:rPr sz="800" b="1">
+                <a:solidFill>
+                  <a:srgbClr val="1A6B40"/>
+                </a:solidFill>
+              </a:rPr>
+              <a:t>Early-Exit  (조기 승인 로직)</a:t>
+            </a:r>
+          </a:p>
+        </p:txBody>
+      </p:sp>
+      <p:sp>
+        <p:nvSpPr>
+          <p:cNvPr id="19" name="Rounded Rectangle 18"/>
+          <p:cNvSpPr/>
+          <p:nvPr/>
+        </p:nvSpPr>
+        <p:spPr>
+          <a:xfrm>
+            <a:off x="457200" y="3858768"/>
+            <a:ext cx="5303520" cy="566928"/>
+          </a:xfrm>
+          <a:prstGeom prst="roundRect">
+            <a:avLst/>
+          </a:prstGeom>
+          <a:solidFill>
+            <a:srgbClr val="D5F5E3"/>
+          </a:solidFill>
+          <a:ln w="19050">
+            <a:solidFill>
+              <a:srgbClr val="27AE60"/>
+            </a:solidFill>
+          </a:ln>
+        </p:spPr>
+        <p:style>
+          <a:lnRef idx="1">
+            <a:schemeClr val="accent1"/>
+          </a:lnRef>
+          <a:fillRef idx="3">
+            <a:schemeClr val="accent1"/>
+          </a:fillRef>
+          <a:effectRef idx="2">
+            <a:schemeClr val="accent1"/>
+          </a:effectRef>
+          <a:fontRef idx="minor">
+            <a:schemeClr val="lt1"/>
+          </a:fontRef>
+        </p:style>
+        <p:txBody>
+          <a:bodyPr rtlCol="0" anchor="ctr" wrap="square"/>
+          <a:lstStyle/>
+          <a:p>
+            <a:pPr algn="ctr">
+              <a:spcBef>
+                <a:spcPts val="100"/>
+              </a:spcBef>
+              <a:spcAft>
+                <a:spcPts val="100"/>
+              </a:spcAft>
+            </a:pPr>
+            <a:r>
+              <a:rPr sz="900" b="1">
+                <a:solidFill>
+                  <a:srgbClr val="1A4A30"/>
+                </a:solidFill>
+              </a:rPr>
+              <a:t>_pdf_fully_confirmed</a:t>
+            </a:r>
+          </a:p>
+          <a:p>
+            <a:pPr algn="ctr">
+              <a:spcBef>
+                <a:spcPts val="100"/>
+              </a:spcBef>
+              <a:spcAft>
+                <a:spcPts val="100"/>
+              </a:spcAft>
+            </a:pPr>
+            <a:r>
+              <a:rPr sz="700" b="0">
+                <a:solidFill>
+                  <a:srgbClr val="335544"/>
+                </a:solidFill>
+              </a:rPr>
+              <a:t>pdf존재 + 모델일치 + 메이커일치 + 사양확인</a:t>
+            </a:r>
+          </a:p>
+        </p:txBody>
+      </p:sp>
+      <p:sp>
+        <p:nvSpPr>
+          <p:cNvPr id="20" name="TextBox 19"/>
+          <p:cNvSpPr txBox="1"/>
+          <p:nvPr/>
+        </p:nvSpPr>
+        <p:spPr>
+          <a:xfrm>
+            <a:off x="777240" y="4480560"/>
+            <a:ext cx="1005840" cy="201168"/>
+          </a:xfrm>
+          <a:prstGeom prst="rect">
+            <a:avLst/>
+          </a:prstGeom>
+          <a:noFill/>
+        </p:spPr>
+        <p:txBody>
+          <a:bodyPr wrap="none" anchor="ctr">
+            <a:spAutoFit/>
+          </a:bodyPr>
+          <a:lstStyle/>
+          <a:p>
+            <a:pPr algn="ctr"/>
+            <a:r>
+              <a:rPr sz="800" b="1">
+                <a:solidFill>
+                  <a:srgbClr val="27AE60"/>
+                </a:solidFill>
+              </a:rPr>
+              <a:t>YES</a:t>
+            </a:r>
+          </a:p>
+        </p:txBody>
+      </p:sp>
+      <p:cxnSp>
+        <p:nvCxnSpPr>
+          <p:cNvPr id="21" name="Connector 20"/>
+          <p:cNvCxnSpPr/>
+          <p:nvPr/>
+        </p:nvCxnSpPr>
+        <p:spPr>
+          <a:xfrm>
+            <a:off x="1417320" y="4581144"/>
+            <a:ext cx="685800" cy="0"/>
+          </a:xfrm>
+          <a:prstGeom prst="line">
+            <a:avLst/>
+          </a:prstGeom>
+          <a:ln w="19050">
+            <a:solidFill>
+              <a:srgbClr val="888888"/>
+            </a:solidFill>
+            <a:tailEnd type="arrow" w="med" len="med"/>
+          </a:ln>
+        </p:spPr>
+        <p:style>
+          <a:lnRef idx="2">
+            <a:schemeClr val="accent1"/>
+          </a:lnRef>
+          <a:fillRef idx="0">
+            <a:schemeClr val="accent1"/>
+          </a:fillRef>
+          <a:effectRef idx="1">
+            <a:schemeClr val="accent1"/>
+          </a:effectRef>
+          <a:fontRef idx="minor">
+            <a:schemeClr val="tx1"/>
+          </a:fontRef>
+        </p:style>
+      </p:cxnSp>
+      <p:sp>
+        <p:nvSpPr>
+          <p:cNvPr id="22" name="Rounded Rectangle 21"/>
+          <p:cNvSpPr/>
+          <p:nvPr/>
+        </p:nvSpPr>
+        <p:spPr>
+          <a:xfrm>
+            <a:off x="2148840" y="4471416"/>
+            <a:ext cx="2286000" cy="420624"/>
+          </a:xfrm>
+          <a:prstGeom prst="roundRect">
+            <a:avLst/>
+          </a:prstGeom>
+          <a:solidFill>
+            <a:srgbClr val="27AE60"/>
+          </a:solidFill>
+          <a:ln w="19050">
+            <a:solidFill>
+              <a:srgbClr val="1E8A49"/>
+            </a:solidFill>
+          </a:ln>
+        </p:spPr>
+        <p:style>
+          <a:lnRef idx="1">
+            <a:schemeClr val="accent1"/>
+          </a:lnRef>
+          <a:fillRef idx="3">
+            <a:schemeClr val="accent1"/>
+          </a:fillRef>
+          <a:effectRef idx="2">
+            <a:schemeClr val="accent1"/>
+          </a:effectRef>
+          <a:fontRef idx="minor">
+            <a:schemeClr val="lt1"/>
+          </a:fontRef>
+        </p:style>
+        <p:txBody>
+          <a:bodyPr rtlCol="0" anchor="ctr" wrap="square"/>
+          <a:lstStyle/>
+          <a:p>
+            <a:pPr algn="ctr">
+              <a:spcBef>
+                <a:spcPts val="100"/>
+              </a:spcBef>
+              <a:spcAft>
+                <a:spcPts val="100"/>
+              </a:spcAft>
+            </a:pPr>
+            <a:r>
+              <a:rPr sz="900" b="1">
+                <a:solidFill>
+                  <a:srgbClr val="FFFFFF"/>
+                </a:solidFill>
+              </a:rPr>
+              <a:t>즉시 승인  ✅</a:t>
+            </a:r>
+          </a:p>
+        </p:txBody>
+      </p:sp>
+      <p:sp>
+        <p:nvSpPr>
+          <p:cNvPr id="23" name="TextBox 22"/>
+          <p:cNvSpPr txBox="1"/>
+          <p:nvPr/>
+        </p:nvSpPr>
+        <p:spPr>
+          <a:xfrm>
+            <a:off x="4526280" y="4480560"/>
+            <a:ext cx="822960" cy="201168"/>
+          </a:xfrm>
+          <a:prstGeom prst="rect">
+            <a:avLst/>
+          </a:prstGeom>
+          <a:noFill/>
+        </p:spPr>
+        <p:txBody>
+          <a:bodyPr wrap="none" anchor="ctr">
+            <a:spAutoFit/>
+          </a:bodyPr>
+          <a:lstStyle/>
+          <a:p>
+            <a:pPr algn="ctr"/>
+            <a:r>
+              <a:rPr sz="800" b="1">
+                <a:solidFill>
+                  <a:srgbClr val="E74C3C"/>
+                </a:solidFill>
+              </a:rPr>
+              <a:t>NO</a:t>
+            </a:r>
+          </a:p>
+        </p:txBody>
+      </p:sp>
+      <p:cxnSp>
+        <p:nvCxnSpPr>
+          <p:cNvPr id="24" name="Connector 23"/>
+          <p:cNvCxnSpPr/>
+          <p:nvPr/>
+        </p:nvCxnSpPr>
+        <p:spPr>
+          <a:xfrm>
+            <a:off x="5074920" y="4581144"/>
+            <a:ext cx="411480" cy="0"/>
+          </a:xfrm>
+          <a:prstGeom prst="line">
+            <a:avLst/>
+          </a:prstGeom>
+          <a:ln w="19050">
+            <a:solidFill>
+              <a:srgbClr val="888888"/>
+            </a:solidFill>
+            <a:tailEnd type="arrow" w="med" len="med"/>
+          </a:ln>
+        </p:spPr>
+        <p:style>
+          <a:lnRef idx="2">
+            <a:schemeClr val="accent1"/>
+          </a:lnRef>
+          <a:fillRef idx="0">
+            <a:schemeClr val="accent1"/>
+          </a:fillRef>
+          <a:effectRef idx="1">
+            <a:schemeClr val="accent1"/>
+          </a:effectRef>
+          <a:fontRef idx="minor">
+            <a:schemeClr val="tx1"/>
+          </a:fontRef>
+        </p:style>
+      </p:cxnSp>
+      <p:sp>
+        <p:nvSpPr>
+          <p:cNvPr id="25" name="Rounded Rectangle 24"/>
+          <p:cNvSpPr/>
+          <p:nvPr/>
+        </p:nvSpPr>
+        <p:spPr>
+          <a:xfrm>
+            <a:off x="5513832" y="4471416"/>
+            <a:ext cx="777240" cy="420624"/>
+          </a:xfrm>
+          <a:prstGeom prst="roundRect">
+            <a:avLst/>
+          </a:prstGeom>
+          <a:solidFill>
+            <a:srgbClr val="D5D8DC"/>
+          </a:solidFill>
+          <a:ln w="19050">
+            <a:solidFill>
+              <a:srgbClr val="95A5A6"/>
+            </a:solidFill>
+          </a:ln>
+        </p:spPr>
+        <p:style>
+          <a:lnRef idx="1">
+            <a:schemeClr val="accent1"/>
+          </a:lnRef>
+          <a:fillRef idx="3">
+            <a:schemeClr val="accent1"/>
+          </a:fillRef>
+          <a:effectRef idx="2">
+            <a:schemeClr val="accent1"/>
+          </a:effectRef>
+          <a:fontRef idx="minor">
+            <a:schemeClr val="lt1"/>
+          </a:fontRef>
+        </p:style>
+        <p:txBody>
+          <a:bodyPr rtlCol="0" anchor="ctr" wrap="square"/>
+          <a:lstStyle/>
+          <a:p>
+            <a:pPr algn="ctr">
+              <a:spcBef>
+                <a:spcPts val="100"/>
+              </a:spcBef>
+              <a:spcAft>
+                <a:spcPts val="100"/>
+              </a:spcAft>
+            </a:pPr>
+            <a:r>
+              <a:rPr sz="800" b="0">
+                <a:solidFill>
+                  <a:srgbClr val="444444"/>
+                </a:solidFill>
+              </a:rPr>
+              <a:t>다음</a:t>
+            </a:r>
+          </a:p>
+        </p:txBody>
+      </p:sp>
+      <p:sp>
+        <p:nvSpPr>
+          <p:cNvPr id="26" name="Rounded Rectangle 25"/>
+          <p:cNvSpPr/>
+          <p:nvPr/>
+        </p:nvSpPr>
+        <p:spPr>
+          <a:xfrm>
+            <a:off x="6355080" y="3858768"/>
+            <a:ext cx="5349240" cy="566928"/>
+          </a:xfrm>
+          <a:prstGeom prst="roundRect">
+            <a:avLst/>
+          </a:prstGeom>
+          <a:solidFill>
+            <a:srgbClr val="D5F5E3"/>
+          </a:solidFill>
+          <a:ln w="19050">
+            <a:solidFill>
+              <a:srgbClr val="27AE60"/>
+            </a:solidFill>
+          </a:ln>
+        </p:spPr>
+        <p:style>
+          <a:lnRef idx="1">
+            <a:schemeClr val="accent1"/>
+          </a:lnRef>
+          <a:fillRef idx="3">
+            <a:schemeClr val="accent1"/>
+          </a:fillRef>
+          <a:effectRef idx="2">
+            <a:schemeClr val="accent1"/>
+          </a:effectRef>
+          <a:fontRef idx="minor">
+            <a:schemeClr val="lt1"/>
+          </a:fontRef>
+        </p:style>
+        <p:txBody>
+          <a:bodyPr rtlCol="0" anchor="ctr" wrap="square"/>
+          <a:lstStyle/>
+          <a:p>
+            <a:pPr algn="ctr">
+              <a:spcBef>
+                <a:spcPts val="100"/>
+              </a:spcBef>
+              <a:spcAft>
+                <a:spcPts val="100"/>
+              </a:spcAft>
+            </a:pPr>
+            <a:r>
+              <a:rPr sz="900" b="1">
+                <a:solidFill>
+                  <a:srgbClr val="1A4A30"/>
+                </a:solidFill>
+              </a:rPr>
+              <a:t>_no_meaningful_specs</a:t>
+            </a:r>
+          </a:p>
+          <a:p>
+            <a:pPr algn="ctr">
+              <a:spcBef>
+                <a:spcPts val="100"/>
+              </a:spcBef>
+              <a:spcAft>
+                <a:spcPts val="100"/>
+              </a:spcAft>
+            </a:pPr>
+            <a:r>
+              <a:rPr sz="700" b="0">
+                <a:solidFill>
+                  <a:srgbClr val="335544"/>
+                </a:solidFill>
+              </a:rPr>
+              <a:t>사양값 전부 9999 (미입력 상태)</a:t>
+            </a:r>
+          </a:p>
+        </p:txBody>
+      </p:sp>
+      <p:sp>
+        <p:nvSpPr>
+          <p:cNvPr id="27" name="TextBox 26"/>
+          <p:cNvSpPr txBox="1"/>
+          <p:nvPr/>
+        </p:nvSpPr>
+        <p:spPr>
+          <a:xfrm>
+            <a:off x="6675120" y="4480560"/>
+            <a:ext cx="1005840" cy="201168"/>
+          </a:xfrm>
+          <a:prstGeom prst="rect">
+            <a:avLst/>
+          </a:prstGeom>
+          <a:noFill/>
+        </p:spPr>
+        <p:txBody>
+          <a:bodyPr wrap="none" anchor="ctr">
+            <a:spAutoFit/>
+          </a:bodyPr>
+          <a:lstStyle/>
+          <a:p>
+            <a:pPr algn="ctr"/>
+            <a:r>
+              <a:rPr sz="800" b="1">
+                <a:solidFill>
+                  <a:srgbClr val="27AE60"/>
+                </a:solidFill>
+              </a:rPr>
+              <a:t>YES</a:t>
+            </a:r>
+          </a:p>
+        </p:txBody>
+      </p:sp>
+      <p:cxnSp>
+        <p:nvCxnSpPr>
+          <p:cNvPr id="28" name="Connector 27"/>
+          <p:cNvCxnSpPr/>
+          <p:nvPr/>
+        </p:nvCxnSpPr>
+        <p:spPr>
+          <a:xfrm>
+            <a:off x="7269480" y="4581144"/>
+            <a:ext cx="685799" cy="0"/>
+          </a:xfrm>
+          <a:prstGeom prst="line">
+            <a:avLst/>
+          </a:prstGeom>
+          <a:ln w="19050">
+            <a:solidFill>
+              <a:srgbClr val="888888"/>
+            </a:solidFill>
+            <a:tailEnd type="arrow" w="med" len="med"/>
+          </a:ln>
+        </p:spPr>
+        <p:style>
+          <a:lnRef idx="2">
+            <a:schemeClr val="accent1"/>
+          </a:lnRef>
+          <a:fillRef idx="0">
+            <a:schemeClr val="accent1"/>
+          </a:fillRef>
+          <a:effectRef idx="1">
+            <a:schemeClr val="accent1"/>
+          </a:effectRef>
+          <a:fontRef idx="minor">
+            <a:schemeClr val="tx1"/>
+          </a:fontRef>
+        </p:style>
+      </p:cxnSp>
+      <p:sp>
+        <p:nvSpPr>
+          <p:cNvPr id="29" name="Rounded Rectangle 28"/>
+          <p:cNvSpPr/>
+          <p:nvPr/>
+        </p:nvSpPr>
+        <p:spPr>
+          <a:xfrm>
+            <a:off x="7982712" y="4471416"/>
+            <a:ext cx="2468880" cy="420624"/>
+          </a:xfrm>
+          <a:prstGeom prst="roundRect">
+            <a:avLst/>
+          </a:prstGeom>
+          <a:solidFill>
+            <a:srgbClr val="27AE60"/>
+          </a:solidFill>
+          <a:ln w="19050">
+            <a:solidFill>
+              <a:srgbClr val="1E8A49"/>
+            </a:solidFill>
+          </a:ln>
+        </p:spPr>
+        <p:style>
+          <a:lnRef idx="1">
+            <a:schemeClr val="accent1"/>
+          </a:lnRef>
+          <a:fillRef idx="3">
+            <a:schemeClr val="accent1"/>
+          </a:fillRef>
+          <a:effectRef idx="2">
+            <a:schemeClr val="accent1"/>
+          </a:effectRef>
+          <a:fontRef idx="minor">
+            <a:schemeClr val="lt1"/>
+          </a:fontRef>
+        </p:style>
+        <p:txBody>
+          <a:bodyPr rtlCol="0" anchor="ctr" wrap="square"/>
+          <a:lstStyle/>
+          <a:p>
+            <a:pPr algn="ctr">
+              <a:spcBef>
+                <a:spcPts val="100"/>
+              </a:spcBef>
+              <a:spcAft>
+                <a:spcPts val="100"/>
+              </a:spcAft>
+            </a:pPr>
+            <a:r>
+              <a:rPr sz="800" b="1">
+                <a:solidFill>
+                  <a:srgbClr val="FFFFFF"/>
+                </a:solidFill>
+              </a:rPr>
+              <a:t>모델·메이커 일치 시 승인  ✅</a:t>
+            </a:r>
+          </a:p>
+        </p:txBody>
+      </p:sp>
+      <p:sp>
+        <p:nvSpPr>
+          <p:cNvPr id="30" name="TextBox 29"/>
+          <p:cNvSpPr txBox="1"/>
+          <p:nvPr/>
+        </p:nvSpPr>
+        <p:spPr>
+          <a:xfrm>
+            <a:off x="10515600" y="4480560"/>
+            <a:ext cx="822960" cy="201168"/>
+          </a:xfrm>
+          <a:prstGeom prst="rect">
+            <a:avLst/>
+          </a:prstGeom>
+          <a:noFill/>
+        </p:spPr>
+        <p:txBody>
+          <a:bodyPr wrap="none" anchor="ctr">
+            <a:spAutoFit/>
+          </a:bodyPr>
+          <a:lstStyle/>
+          <a:p>
+            <a:pPr algn="ctr"/>
+            <a:r>
+              <a:rPr sz="800" b="1">
+                <a:solidFill>
+                  <a:srgbClr val="E74C3C"/>
+                </a:solidFill>
+              </a:rPr>
+              <a:t>NO</a:t>
+            </a:r>
+          </a:p>
+        </p:txBody>
+      </p:sp>
+      <p:cxnSp>
+        <p:nvCxnSpPr>
+          <p:cNvPr id="31" name="Connector 30"/>
+          <p:cNvCxnSpPr/>
+          <p:nvPr/>
+        </p:nvCxnSpPr>
+        <p:spPr>
+          <a:xfrm>
+            <a:off x="11064240" y="4581144"/>
+            <a:ext cx="411480" cy="0"/>
+          </a:xfrm>
+          <a:prstGeom prst="line">
+            <a:avLst/>
+          </a:prstGeom>
+          <a:ln w="19050">
+            <a:solidFill>
+              <a:srgbClr val="888888"/>
+            </a:solidFill>
+            <a:tailEnd type="arrow" w="med" len="med"/>
+          </a:ln>
+        </p:spPr>
+        <p:style>
+          <a:lnRef idx="2">
+            <a:schemeClr val="accent1"/>
+          </a:lnRef>
+          <a:fillRef idx="0">
+            <a:schemeClr val="accent1"/>
+          </a:fillRef>
+          <a:effectRef idx="1">
+            <a:schemeClr val="accent1"/>
+          </a:effectRef>
+          <a:fontRef idx="minor">
+            <a:schemeClr val="tx1"/>
+          </a:fontRef>
+        </p:style>
+      </p:cxnSp>
+      <p:sp>
+        <p:nvSpPr>
+          <p:cNvPr id="32" name="Rounded Rectangle 31"/>
+          <p:cNvSpPr/>
+          <p:nvPr/>
+        </p:nvSpPr>
+        <p:spPr>
+          <a:xfrm>
+            <a:off x="11503152" y="4471416"/>
+            <a:ext cx="777240" cy="420624"/>
+          </a:xfrm>
+          <a:prstGeom prst="roundRect">
+            <a:avLst/>
+          </a:prstGeom>
+          <a:solidFill>
+            <a:srgbClr val="D5D8DC"/>
+          </a:solidFill>
+          <a:ln w="19050">
+            <a:solidFill>
+              <a:srgbClr val="95A5A6"/>
+            </a:solidFill>
+          </a:ln>
+        </p:spPr>
+        <p:style>
+          <a:lnRef idx="1">
+            <a:schemeClr val="accent1"/>
+          </a:lnRef>
+          <a:fillRef idx="3">
+            <a:schemeClr val="accent1"/>
+          </a:fillRef>
+          <a:effectRef idx="2">
+            <a:schemeClr val="accent1"/>
+          </a:effectRef>
+          <a:fontRef idx="minor">
+            <a:schemeClr val="lt1"/>
+          </a:fontRef>
+        </p:style>
+        <p:txBody>
+          <a:bodyPr rtlCol="0" anchor="ctr" wrap="square"/>
+          <a:lstStyle/>
+          <a:p>
+            <a:pPr algn="ctr">
+              <a:spcBef>
+                <a:spcPts val="100"/>
+              </a:spcBef>
+              <a:spcAft>
+                <a:spcPts val="100"/>
+              </a:spcAft>
+            </a:pPr>
+            <a:r>
+              <a:rPr sz="800" b="0">
+                <a:solidFill>
+                  <a:srgbClr val="444444"/>
+                </a:solidFill>
+              </a:rPr>
+              <a:t>Step</a:t>
+            </a:r>
+          </a:p>
+        </p:txBody>
+      </p:sp>
+      <p:cxnSp>
+        <p:nvCxnSpPr>
+          <p:cNvPr id="33" name="Connector 32"/>
+          <p:cNvCxnSpPr/>
+          <p:nvPr/>
+        </p:nvCxnSpPr>
+        <p:spPr>
+          <a:xfrm>
+            <a:off x="6094476" y="5138928"/>
+            <a:ext cx="0" cy="137160"/>
+          </a:xfrm>
+          <a:prstGeom prst="line">
+            <a:avLst/>
+          </a:prstGeom>
+          <a:ln w="19050">
+            <a:solidFill>
+              <a:srgbClr val="888888"/>
+            </a:solidFill>
+            <a:tailEnd type="arrow" w="med" len="med"/>
+          </a:ln>
+        </p:spPr>
+        <p:style>
+          <a:lnRef idx="2">
+            <a:schemeClr val="accent1"/>
+          </a:lnRef>
+          <a:fillRef idx="0">
+            <a:schemeClr val="accent1"/>
+          </a:fillRef>
+          <a:effectRef idx="1">
+            <a:schemeClr val="accent1"/>
+          </a:effectRef>
+          <a:fontRef idx="minor">
+            <a:schemeClr val="tx1"/>
+          </a:fontRef>
+        </p:style>
+      </p:cxnSp>
+      <p:sp>
+        <p:nvSpPr>
+          <p:cNvPr id="34" name="Rectangle 33"/>
+          <p:cNvSpPr/>
+          <p:nvPr/>
+        </p:nvSpPr>
+        <p:spPr>
+          <a:xfrm>
+            <a:off x="274320" y="5303520"/>
+            <a:ext cx="11640312" cy="987552"/>
+          </a:xfrm>
+          <a:prstGeom prst="rect">
+            <a:avLst/>
+          </a:prstGeom>
+          <a:solidFill>
+            <a:srgbClr val="EAF0FB"/>
+          </a:solidFill>
+          <a:ln w="15240">
+            <a:solidFill>
+              <a:srgbClr val="2C3E50"/>
+            </a:solidFill>
+            <a:prstDash val="dash"/>
+          </a:ln>
+        </p:spPr>
+        <p:style>
+          <a:lnRef idx="1">
+            <a:schemeClr val="accent1"/>
+          </a:lnRef>
+          <a:fillRef idx="3">
+            <a:schemeClr val="accent1"/>
+          </a:fillRef>
+          <a:effectRef idx="2">
+            <a:schemeClr val="accent1"/>
+          </a:effectRef>
+          <a:fontRef idx="minor">
+            <a:schemeClr val="lt1"/>
+          </a:fontRef>
+        </p:style>
+        <p:txBody>
+          <a:bodyPr rtlCol="0" anchor="ctr"/>
+          <a:lstStyle/>
+          <a:p>
+            <a:pPr algn="ctr"/>
+          </a:p>
+        </p:txBody>
+      </p:sp>
+      <p:sp>
+        <p:nvSpPr>
+          <p:cNvPr id="35" name="TextBox 34"/>
+          <p:cNvSpPr txBox="1"/>
+          <p:nvPr/>
+        </p:nvSpPr>
+        <p:spPr>
+          <a:xfrm>
+            <a:off x="438912" y="5321808"/>
+            <a:ext cx="5486400" cy="201168"/>
+          </a:xfrm>
+          <a:prstGeom prst="rect">
+            <a:avLst/>
+          </a:prstGeom>
+          <a:noFill/>
+        </p:spPr>
+        <p:txBody>
+          <a:bodyPr wrap="none" anchor="ctr">
+            <a:spAutoFit/>
+          </a:bodyPr>
+          <a:lstStyle/>
+          <a:p>
+            <a:pPr algn="ctr"/>
+            <a:r>
+              <a:rPr sz="800" b="1">
+                <a:solidFill>
+                  <a:srgbClr val="2C3E50"/>
+                </a:solidFill>
+              </a:rPr>
+              <a:t>LangGraph 워크플로우  (graph.py)</a:t>
+            </a:r>
+          </a:p>
+        </p:txBody>
+      </p:sp>
+      <p:sp>
+        <p:nvSpPr>
+          <p:cNvPr id="36" name="Rounded Rectangle 35"/>
+          <p:cNvSpPr/>
+          <p:nvPr/>
+        </p:nvSpPr>
+        <p:spPr>
+          <a:xfrm>
+            <a:off x="411480" y="5458968"/>
+            <a:ext cx="1463040" cy="749808"/>
+          </a:xfrm>
+          <a:prstGeom prst="roundRect">
+            <a:avLst/>
+          </a:prstGeom>
+          <a:solidFill>
+            <a:srgbClr val="EAF0FB"/>
+          </a:solidFill>
+          <a:ln w="19050">
+            <a:solidFill>
+              <a:srgbClr val="2C3E50"/>
+            </a:solidFill>
+          </a:ln>
+        </p:spPr>
+        <p:style>
+          <a:lnRef idx="1">
+            <a:schemeClr val="accent1"/>
+          </a:lnRef>
+          <a:fillRef idx="3">
+            <a:schemeClr val="accent1"/>
+          </a:fillRef>
+          <a:effectRef idx="2">
+            <a:schemeClr val="accent1"/>
+          </a:effectRef>
+          <a:fontRef idx="minor">
+            <a:schemeClr val="lt1"/>
+          </a:fontRef>
+        </p:style>
+        <p:txBody>
+          <a:bodyPr rtlCol="0" anchor="ctr" wrap="square"/>
+          <a:lstStyle/>
+          <a:p>
+            <a:pPr algn="ctr">
+              <a:spcBef>
+                <a:spcPts val="100"/>
+              </a:spcBef>
+              <a:spcAft>
+                <a:spcPts val="100"/>
+              </a:spcAft>
+            </a:pPr>
+            <a:r>
+              <a:rPr sz="700" b="1">
+                <a:solidFill>
+                  <a:srgbClr val="2C3E50"/>
+                </a:solidFill>
+              </a:rPr>
+              <a:t>STEP 0</a:t>
+            </a:r>
+          </a:p>
+          <a:p>
+            <a:pPr algn="ctr">
+              <a:spcBef>
+                <a:spcPts val="100"/>
+              </a:spcBef>
+              <a:spcAft>
+                <a:spcPts val="100"/>
+              </a:spcAft>
+            </a:pPr>
+            <a:r>
+              <a:rPr sz="900" b="1">
+                <a:solidFill>
+                  <a:srgbClr val="1A1A2E"/>
+                </a:solidFill>
+              </a:rPr>
+              <a:t>입력 검증</a:t>
+            </a:r>
+          </a:p>
+          <a:p>
+            <a:pPr algn="ctr">
+              <a:spcBef>
+                <a:spcPts val="100"/>
+              </a:spcBef>
+              <a:spcAft>
+                <a:spcPts val="100"/>
+              </a:spcAft>
+            </a:pPr>
+            <a:r>
+              <a:rPr sz="700" b="0">
+                <a:solidFill>
+                  <a:srgbClr val="555555"/>
+                </a:solidFill>
+              </a:rPr>
+              <a:t>필드·PDF 존재</a:t>
+            </a:r>
+          </a:p>
+        </p:txBody>
+      </p:sp>
+      <p:cxnSp>
+        <p:nvCxnSpPr>
+          <p:cNvPr id="37" name="Connector 36"/>
+          <p:cNvCxnSpPr/>
+          <p:nvPr/>
+        </p:nvCxnSpPr>
+        <p:spPr>
+          <a:xfrm>
+            <a:off x="1874520" y="5833872"/>
+            <a:ext cx="201168" cy="0"/>
+          </a:xfrm>
+          <a:prstGeom prst="line">
+            <a:avLst/>
+          </a:prstGeom>
+          <a:ln w="19050">
+            <a:solidFill>
+              <a:srgbClr val="888888"/>
+            </a:solidFill>
+            <a:tailEnd type="arrow" w="med" len="med"/>
+          </a:ln>
+        </p:spPr>
+        <p:style>
+          <a:lnRef idx="2">
+            <a:schemeClr val="accent1"/>
+          </a:lnRef>
+          <a:fillRef idx="0">
+            <a:schemeClr val="accent1"/>
+          </a:fillRef>
+          <a:effectRef idx="1">
+            <a:schemeClr val="accent1"/>
+          </a:effectRef>
+          <a:fontRef idx="minor">
+            <a:schemeClr val="tx1"/>
+          </a:fontRef>
+        </p:style>
+      </p:cxnSp>
+      <p:sp>
+        <p:nvSpPr>
+          <p:cNvPr id="38" name="Rounded Rectangle 37"/>
+          <p:cNvSpPr/>
+          <p:nvPr/>
+        </p:nvSpPr>
+        <p:spPr>
+          <a:xfrm>
+            <a:off x="2075688" y="5458968"/>
+            <a:ext cx="1463040" cy="749808"/>
+          </a:xfrm>
+          <a:prstGeom prst="roundRect">
+            <a:avLst/>
+          </a:prstGeom>
+          <a:solidFill>
+            <a:srgbClr val="EAF0FB"/>
+          </a:solidFill>
+          <a:ln w="19050">
+            <a:solidFill>
+              <a:srgbClr val="2C3E50"/>
+            </a:solidFill>
+          </a:ln>
+        </p:spPr>
+        <p:style>
+          <a:lnRef idx="1">
+            <a:schemeClr val="accent1"/>
+          </a:lnRef>
+          <a:fillRef idx="3">
+            <a:schemeClr val="accent1"/>
+          </a:fillRef>
+          <a:effectRef idx="2">
+            <a:schemeClr val="accent1"/>
+          </a:effectRef>
+          <a:fontRef idx="minor">
+            <a:schemeClr val="lt1"/>
+          </a:fontRef>
+        </p:style>
+        <p:txBody>
+          <a:bodyPr rtlCol="0" anchor="ctr" wrap="square"/>
+          <a:lstStyle/>
+          <a:p>
+            <a:pPr algn="ctr">
+              <a:spcBef>
+                <a:spcPts val="100"/>
+              </a:spcBef>
+              <a:spcAft>
+                <a:spcPts val="100"/>
+              </a:spcAft>
+            </a:pPr>
+            <a:r>
+              <a:rPr sz="700" b="1">
+                <a:solidFill>
+                  <a:srgbClr val="2C3E50"/>
+                </a:solidFill>
+              </a:rPr>
+              <a:t>STEP 1</a:t>
+            </a:r>
+          </a:p>
+          <a:p>
+            <a:pPr algn="ctr">
+              <a:spcBef>
+                <a:spcPts val="100"/>
+              </a:spcBef>
+              <a:spcAft>
+                <a:spcPts val="100"/>
+              </a:spcAft>
+            </a:pPr>
+            <a:r>
+              <a:rPr sz="900" b="1">
+                <a:solidFill>
+                  <a:srgbClr val="1A1A2E"/>
+                </a:solidFill>
+              </a:rPr>
+              <a:t>PDF 파싱</a:t>
+            </a:r>
+          </a:p>
+          <a:p>
+            <a:pPr algn="ctr">
+              <a:spcBef>
+                <a:spcPts val="100"/>
+              </a:spcBef>
+              <a:spcAft>
+                <a:spcPts val="100"/>
+              </a:spcAft>
+            </a:pPr>
+            <a:r>
+              <a:rPr sz="700" b="0">
+                <a:solidFill>
+                  <a:srgbClr val="555555"/>
+                </a:solidFill>
+              </a:rPr>
+              <a:t>모델·메이커 매칭</a:t>
+            </a:r>
+          </a:p>
+        </p:txBody>
+      </p:sp>
+      <p:cxnSp>
+        <p:nvCxnSpPr>
+          <p:cNvPr id="39" name="Connector 38"/>
+          <p:cNvCxnSpPr/>
+          <p:nvPr/>
+        </p:nvCxnSpPr>
+        <p:spPr>
+          <a:xfrm>
+            <a:off x="3538728" y="5833872"/>
+            <a:ext cx="201168" cy="0"/>
+          </a:xfrm>
+          <a:prstGeom prst="line">
+            <a:avLst/>
+          </a:prstGeom>
+          <a:ln w="19050">
+            <a:solidFill>
+              <a:srgbClr val="888888"/>
+            </a:solidFill>
+            <a:tailEnd type="arrow" w="med" len="med"/>
+          </a:ln>
+        </p:spPr>
+        <p:style>
+          <a:lnRef idx="2">
+            <a:schemeClr val="accent1"/>
+          </a:lnRef>
+          <a:fillRef idx="0">
+            <a:schemeClr val="accent1"/>
+          </a:fillRef>
+          <a:effectRef idx="1">
+            <a:schemeClr val="accent1"/>
+          </a:effectRef>
+          <a:fontRef idx="minor">
+            <a:schemeClr val="tx1"/>
+          </a:fontRef>
+        </p:style>
+      </p:cxnSp>
+      <p:sp>
+        <p:nvSpPr>
+          <p:cNvPr id="40" name="Rounded Rectangle 39"/>
+          <p:cNvSpPr/>
+          <p:nvPr/>
+        </p:nvSpPr>
+        <p:spPr>
+          <a:xfrm>
+            <a:off x="3739896" y="5458968"/>
+            <a:ext cx="1463040" cy="749808"/>
+          </a:xfrm>
+          <a:prstGeom prst="roundRect">
+            <a:avLst/>
+          </a:prstGeom>
+          <a:solidFill>
+            <a:srgbClr val="EAF0FB"/>
+          </a:solidFill>
+          <a:ln w="19050">
+            <a:solidFill>
+              <a:srgbClr val="2C3E50"/>
+            </a:solidFill>
+          </a:ln>
+        </p:spPr>
+        <p:style>
+          <a:lnRef idx="1">
+            <a:schemeClr val="accent1"/>
+          </a:lnRef>
+          <a:fillRef idx="3">
+            <a:schemeClr val="accent1"/>
+          </a:fillRef>
+          <a:effectRef idx="2">
+            <a:schemeClr val="accent1"/>
+          </a:effectRef>
+          <a:fontRef idx="minor">
+            <a:schemeClr val="lt1"/>
+          </a:fontRef>
+        </p:style>
+        <p:txBody>
+          <a:bodyPr rtlCol="0" anchor="ctr" wrap="square"/>
+          <a:lstStyle/>
+          <a:p>
+            <a:pPr algn="ctr">
+              <a:spcBef>
+                <a:spcPts val="100"/>
+              </a:spcBef>
+              <a:spcAft>
+                <a:spcPts val="100"/>
+              </a:spcAft>
+            </a:pPr>
+            <a:r>
+              <a:rPr sz="700" b="1">
+                <a:solidFill>
+                  <a:srgbClr val="2C3E50"/>
+                </a:solidFill>
+              </a:rPr>
+              <a:t>STEP 2</a:t>
+            </a:r>
+          </a:p>
+          <a:p>
+            <a:pPr algn="ctr">
+              <a:spcBef>
+                <a:spcPts val="100"/>
+              </a:spcBef>
+              <a:spcAft>
+                <a:spcPts val="100"/>
+              </a:spcAft>
+            </a:pPr>
+            <a:r>
+              <a:rPr sz="900" b="1">
+                <a:solidFill>
+                  <a:srgbClr val="1A1A2E"/>
+                </a:solidFill>
+              </a:rPr>
+              <a:t>신뢰도</a:t>
+            </a:r>
+          </a:p>
+          <a:p>
+            <a:pPr algn="ctr">
+              <a:spcBef>
+                <a:spcPts val="100"/>
+              </a:spcBef>
+              <a:spcAft>
+                <a:spcPts val="100"/>
+              </a:spcAft>
+            </a:pPr>
+            <a:r>
+              <a:rPr sz="700" b="0">
+                <a:solidFill>
+                  <a:srgbClr val="555555"/>
+                </a:solidFill>
+              </a:rPr>
+              <a:t>PDF 출처 품질</a:t>
+            </a:r>
+          </a:p>
+        </p:txBody>
+      </p:sp>
+      <p:cxnSp>
+        <p:nvCxnSpPr>
+          <p:cNvPr id="41" name="Connector 40"/>
+          <p:cNvCxnSpPr/>
+          <p:nvPr/>
+        </p:nvCxnSpPr>
+        <p:spPr>
+          <a:xfrm>
+            <a:off x="5202936" y="5833872"/>
+            <a:ext cx="201167" cy="0"/>
+          </a:xfrm>
+          <a:prstGeom prst="line">
+            <a:avLst/>
+          </a:prstGeom>
+          <a:ln w="19050">
+            <a:solidFill>
+              <a:srgbClr val="888888"/>
+            </a:solidFill>
+            <a:tailEnd type="arrow" w="med" len="med"/>
+          </a:ln>
+        </p:spPr>
+        <p:style>
+          <a:lnRef idx="2">
+            <a:schemeClr val="accent1"/>
+          </a:lnRef>
+          <a:fillRef idx="0">
+            <a:schemeClr val="accent1"/>
+          </a:fillRef>
+          <a:effectRef idx="1">
+            <a:schemeClr val="accent1"/>
+          </a:effectRef>
+          <a:fontRef idx="minor">
+            <a:schemeClr val="tx1"/>
+          </a:fontRef>
+        </p:style>
+      </p:cxnSp>
+      <p:sp>
+        <p:nvSpPr>
+          <p:cNvPr id="42" name="Rounded Rectangle 41"/>
+          <p:cNvSpPr/>
+          <p:nvPr/>
+        </p:nvSpPr>
+        <p:spPr>
+          <a:xfrm>
+            <a:off x="5404104" y="5458968"/>
+            <a:ext cx="1463040" cy="749808"/>
+          </a:xfrm>
+          <a:prstGeom prst="roundRect">
+            <a:avLst/>
+          </a:prstGeom>
+          <a:solidFill>
+            <a:srgbClr val="EAF0FB"/>
+          </a:solidFill>
+          <a:ln w="19050">
+            <a:solidFill>
+              <a:srgbClr val="2C3E50"/>
+            </a:solidFill>
+          </a:ln>
+        </p:spPr>
+        <p:style>
+          <a:lnRef idx="1">
+            <a:schemeClr val="accent1"/>
+          </a:lnRef>
+          <a:fillRef idx="3">
+            <a:schemeClr val="accent1"/>
+          </a:fillRef>
+          <a:effectRef idx="2">
+            <a:schemeClr val="accent1"/>
+          </a:effectRef>
+          <a:fontRef idx="minor">
+            <a:schemeClr val="lt1"/>
+          </a:fontRef>
+        </p:style>
+        <p:txBody>
+          <a:bodyPr rtlCol="0" anchor="ctr" wrap="square"/>
+          <a:lstStyle/>
+          <a:p>
+            <a:pPr algn="ctr">
+              <a:spcBef>
+                <a:spcPts val="100"/>
+              </a:spcBef>
+              <a:spcAft>
+                <a:spcPts val="100"/>
+              </a:spcAft>
+            </a:pPr>
+            <a:r>
+              <a:rPr sz="700" b="1">
+                <a:solidFill>
+                  <a:srgbClr val="2C3E50"/>
+                </a:solidFill>
+              </a:rPr>
+              <a:t>STEP 3</a:t>
+            </a:r>
+          </a:p>
+          <a:p>
+            <a:pPr algn="ctr">
+              <a:spcBef>
+                <a:spcPts val="100"/>
+              </a:spcBef>
+              <a:spcAft>
+                <a:spcPts val="100"/>
+              </a:spcAft>
+            </a:pPr>
+            <a:r>
+              <a:rPr sz="900" b="1">
+                <a:solidFill>
+                  <a:srgbClr val="1A1A2E"/>
+                </a:solidFill>
+              </a:rPr>
+              <a:t>사양 비교</a:t>
+            </a:r>
+          </a:p>
+          <a:p>
+            <a:pPr algn="ctr">
+              <a:spcBef>
+                <a:spcPts val="100"/>
+              </a:spcBef>
+              <a:spcAft>
+                <a:spcPts val="100"/>
+              </a:spcAft>
+            </a:pPr>
+            <a:r>
+              <a:rPr sz="700" b="0">
+                <a:solidFill>
+                  <a:srgbClr val="555555"/>
+                </a:solidFill>
+              </a:rPr>
+              <a:t>Claude API</a:t>
+            </a:r>
+          </a:p>
+        </p:txBody>
+      </p:sp>
+      <p:cxnSp>
+        <p:nvCxnSpPr>
+          <p:cNvPr id="43" name="Connector 42"/>
+          <p:cNvCxnSpPr/>
+          <p:nvPr/>
+        </p:nvCxnSpPr>
+        <p:spPr>
+          <a:xfrm>
+            <a:off x="6867144" y="5833872"/>
+            <a:ext cx="201168" cy="0"/>
+          </a:xfrm>
+          <a:prstGeom prst="line">
+            <a:avLst/>
+          </a:prstGeom>
+          <a:ln w="19050">
+            <a:solidFill>
+              <a:srgbClr val="888888"/>
+            </a:solidFill>
+            <a:tailEnd type="arrow" w="med" len="med"/>
+          </a:ln>
+        </p:spPr>
+        <p:style>
+          <a:lnRef idx="2">
+            <a:schemeClr val="accent1"/>
+          </a:lnRef>
+          <a:fillRef idx="0">
+            <a:schemeClr val="accent1"/>
+          </a:fillRef>
+          <a:effectRef idx="1">
+            <a:schemeClr val="accent1"/>
+          </a:effectRef>
+          <a:fontRef idx="minor">
+            <a:schemeClr val="tx1"/>
+          </a:fontRef>
+        </p:style>
+      </p:cxnSp>
+      <p:sp>
+        <p:nvSpPr>
+          <p:cNvPr id="44" name="Rounded Rectangle 43"/>
+          <p:cNvSpPr/>
+          <p:nvPr/>
+        </p:nvSpPr>
+        <p:spPr>
+          <a:xfrm>
+            <a:off x="7068312" y="5458968"/>
+            <a:ext cx="1463040" cy="749808"/>
+          </a:xfrm>
+          <a:prstGeom prst="roundRect">
+            <a:avLst/>
+          </a:prstGeom>
+          <a:solidFill>
+            <a:srgbClr val="EAF0FB"/>
+          </a:solidFill>
+          <a:ln w="19050">
+            <a:solidFill>
+              <a:srgbClr val="2C3E50"/>
+            </a:solidFill>
+          </a:ln>
+        </p:spPr>
+        <p:style>
+          <a:lnRef idx="1">
+            <a:schemeClr val="accent1"/>
+          </a:lnRef>
+          <a:fillRef idx="3">
+            <a:schemeClr val="accent1"/>
+          </a:fillRef>
+          <a:effectRef idx="2">
+            <a:schemeClr val="accent1"/>
+          </a:effectRef>
+          <a:fontRef idx="minor">
+            <a:schemeClr val="lt1"/>
+          </a:fontRef>
+        </p:style>
+        <p:txBody>
+          <a:bodyPr rtlCol="0" anchor="ctr" wrap="square"/>
+          <a:lstStyle/>
+          <a:p>
+            <a:pPr algn="ctr">
+              <a:spcBef>
+                <a:spcPts val="100"/>
+              </a:spcBef>
+              <a:spcAft>
+                <a:spcPts val="100"/>
+              </a:spcAft>
+            </a:pPr>
+            <a:r>
+              <a:rPr sz="700" b="1">
+                <a:solidFill>
+                  <a:srgbClr val="2C3E50"/>
+                </a:solidFill>
+              </a:rPr>
+              <a:t>STEP 4</a:t>
+            </a:r>
+          </a:p>
+          <a:p>
+            <a:pPr algn="ctr">
+              <a:spcBef>
+                <a:spcPts val="100"/>
+              </a:spcBef>
+              <a:spcAft>
+                <a:spcPts val="100"/>
+              </a:spcAft>
+            </a:pPr>
+            <a:r>
+              <a:rPr sz="900" b="1">
+                <a:solidFill>
+                  <a:srgbClr val="1A1A2E"/>
+                </a:solidFill>
+              </a:rPr>
+              <a:t>메이커 검증</a:t>
+            </a:r>
+          </a:p>
+          <a:p>
+            <a:pPr algn="ctr">
+              <a:spcBef>
+                <a:spcPts val="100"/>
+              </a:spcBef>
+              <a:spcAft>
+                <a:spcPts val="100"/>
+              </a:spcAft>
+            </a:pPr>
+            <a:r>
+              <a:rPr sz="700" b="0">
+                <a:solidFill>
+                  <a:srgbClr val="555555"/>
+                </a:solidFill>
+              </a:rPr>
+              <a:t>maker_list + hints</a:t>
+            </a:r>
+          </a:p>
+        </p:txBody>
+      </p:sp>
+      <p:cxnSp>
+        <p:nvCxnSpPr>
+          <p:cNvPr id="45" name="Connector 44"/>
+          <p:cNvCxnSpPr/>
+          <p:nvPr/>
+        </p:nvCxnSpPr>
+        <p:spPr>
+          <a:xfrm>
+            <a:off x="8531352" y="5833872"/>
+            <a:ext cx="201168" cy="0"/>
+          </a:xfrm>
+          <a:prstGeom prst="line">
+            <a:avLst/>
+          </a:prstGeom>
+          <a:ln w="19050">
+            <a:solidFill>
+              <a:srgbClr val="888888"/>
+            </a:solidFill>
+            <a:tailEnd type="arrow" w="med" len="med"/>
+          </a:ln>
+        </p:spPr>
+        <p:style>
+          <a:lnRef idx="2">
+            <a:schemeClr val="accent1"/>
+          </a:lnRef>
+          <a:fillRef idx="0">
+            <a:schemeClr val="accent1"/>
+          </a:fillRef>
+          <a:effectRef idx="1">
+            <a:schemeClr val="accent1"/>
+          </a:effectRef>
+          <a:fontRef idx="minor">
+            <a:schemeClr val="tx1"/>
+          </a:fontRef>
+        </p:style>
+      </p:cxnSp>
+      <p:sp>
+        <p:nvSpPr>
+          <p:cNvPr id="46" name="Rounded Rectangle 45"/>
+          <p:cNvSpPr/>
+          <p:nvPr/>
+        </p:nvSpPr>
+        <p:spPr>
+          <a:xfrm>
+            <a:off x="8732519" y="5458968"/>
+            <a:ext cx="1463040" cy="749808"/>
+          </a:xfrm>
+          <a:prstGeom prst="roundRect">
+            <a:avLst/>
+          </a:prstGeom>
+          <a:solidFill>
+            <a:srgbClr val="EAF0FB"/>
+          </a:solidFill>
+          <a:ln w="19050">
+            <a:solidFill>
+              <a:srgbClr val="2C3E50"/>
+            </a:solidFill>
+          </a:ln>
+        </p:spPr>
+        <p:style>
+          <a:lnRef idx="1">
+            <a:schemeClr val="accent1"/>
+          </a:lnRef>
+          <a:fillRef idx="3">
+            <a:schemeClr val="accent1"/>
+          </a:fillRef>
+          <a:effectRef idx="2">
+            <a:schemeClr val="accent1"/>
+          </a:effectRef>
+          <a:fontRef idx="minor">
+            <a:schemeClr val="lt1"/>
+          </a:fontRef>
+        </p:style>
+        <p:txBody>
+          <a:bodyPr rtlCol="0" anchor="ctr" wrap="square"/>
+          <a:lstStyle/>
+          <a:p>
+            <a:pPr algn="ctr">
+              <a:spcBef>
+                <a:spcPts val="100"/>
+              </a:spcBef>
+              <a:spcAft>
+                <a:spcPts val="100"/>
+              </a:spcAft>
+            </a:pPr>
+            <a:r>
+              <a:rPr sz="700" b="1">
+                <a:solidFill>
+                  <a:srgbClr val="2C3E50"/>
+                </a:solidFill>
+              </a:rPr>
+              <a:t>STEP 5</a:t>
+            </a:r>
+          </a:p>
+          <a:p>
+            <a:pPr algn="ctr">
+              <a:spcBef>
+                <a:spcPts val="100"/>
+              </a:spcBef>
+              <a:spcAft>
+                <a:spcPts val="100"/>
+              </a:spcAft>
+            </a:pPr>
+            <a:r>
+              <a:rPr sz="900" b="1">
+                <a:solidFill>
+                  <a:srgbClr val="1A1A2E"/>
+                </a:solidFill>
+              </a:rPr>
+              <a:t>중복 검사</a:t>
+            </a:r>
+          </a:p>
+          <a:p>
+            <a:pPr algn="ctr">
+              <a:spcBef>
+                <a:spcPts val="100"/>
+              </a:spcBef>
+              <a:spcAft>
+                <a:spcPts val="100"/>
+              </a:spcAft>
+            </a:pPr>
+            <a:r>
+              <a:rPr sz="700" b="0">
+                <a:solidFill>
+                  <a:srgbClr val="555555"/>
+                </a:solidFill>
+              </a:rPr>
+              <a:t>SQLite</a:t>
+            </a:r>
+          </a:p>
+        </p:txBody>
+      </p:sp>
+      <p:cxnSp>
+        <p:nvCxnSpPr>
+          <p:cNvPr id="47" name="Connector 46"/>
+          <p:cNvCxnSpPr/>
+          <p:nvPr/>
+        </p:nvCxnSpPr>
+        <p:spPr>
+          <a:xfrm>
+            <a:off x="10195559" y="5833872"/>
+            <a:ext cx="201169" cy="0"/>
+          </a:xfrm>
+          <a:prstGeom prst="line">
+            <a:avLst/>
+          </a:prstGeom>
+          <a:ln w="19050">
+            <a:solidFill>
+              <a:srgbClr val="888888"/>
+            </a:solidFill>
+            <a:tailEnd type="arrow" w="med" len="med"/>
+          </a:ln>
+        </p:spPr>
+        <p:style>
+          <a:lnRef idx="2">
+            <a:schemeClr val="accent1"/>
+          </a:lnRef>
+          <a:fillRef idx="0">
+            <a:schemeClr val="accent1"/>
+          </a:fillRef>
+          <a:effectRef idx="1">
+            <a:schemeClr val="accent1"/>
+          </a:effectRef>
+          <a:fontRef idx="minor">
+            <a:schemeClr val="tx1"/>
+          </a:fontRef>
+        </p:style>
+      </p:cxnSp>
+      <p:sp>
+        <p:nvSpPr>
+          <p:cNvPr id="48" name="Rounded Rectangle 47"/>
+          <p:cNvSpPr/>
+          <p:nvPr/>
+        </p:nvSpPr>
+        <p:spPr>
+          <a:xfrm>
+            <a:off x="10396728" y="5458968"/>
+            <a:ext cx="1463040" cy="749808"/>
+          </a:xfrm>
+          <a:prstGeom prst="roundRect">
+            <a:avLst/>
+          </a:prstGeom>
+          <a:solidFill>
+            <a:srgbClr val="F4ECF7"/>
+          </a:solidFill>
+          <a:ln w="19050">
+            <a:solidFill>
+              <a:srgbClr val="8E44AD"/>
+            </a:solidFill>
+          </a:ln>
+        </p:spPr>
+        <p:style>
+          <a:lnRef idx="1">
+            <a:schemeClr val="accent1"/>
+          </a:lnRef>
+          <a:fillRef idx="3">
+            <a:schemeClr val="accent1"/>
+          </a:fillRef>
+          <a:effectRef idx="2">
+            <a:schemeClr val="accent1"/>
+          </a:effectRef>
+          <a:fontRef idx="minor">
+            <a:schemeClr val="lt1"/>
+          </a:fontRef>
+        </p:style>
+        <p:txBody>
+          <a:bodyPr rtlCol="0" anchor="ctr" wrap="square"/>
+          <a:lstStyle/>
+          <a:p>
+            <a:pPr algn="ctr">
+              <a:spcBef>
+                <a:spcPts val="100"/>
+              </a:spcBef>
+              <a:spcAft>
+                <a:spcPts val="100"/>
+              </a:spcAft>
+            </a:pPr>
+            <a:r>
+              <a:rPr sz="700" b="1">
+                <a:solidFill>
+                  <a:srgbClr val="8E44AD"/>
+                </a:solidFill>
+              </a:rPr>
+              <a:t>STEP 6</a:t>
+            </a:r>
+          </a:p>
+          <a:p>
+            <a:pPr algn="ctr">
+              <a:spcBef>
+                <a:spcPts val="100"/>
+              </a:spcBef>
+              <a:spcAft>
+                <a:spcPts val="100"/>
+              </a:spcAft>
+            </a:pPr>
+            <a:r>
+              <a:rPr sz="900" b="1">
+                <a:solidFill>
+                  <a:srgbClr val="1A1A2E"/>
+                </a:solidFill>
+              </a:rPr>
+              <a:t>최종 판정</a:t>
+            </a:r>
+          </a:p>
+          <a:p>
+            <a:pPr algn="ctr">
+              <a:spcBef>
+                <a:spcPts val="100"/>
+              </a:spcBef>
+              <a:spcAft>
+                <a:spcPts val="100"/>
+              </a:spcAft>
+            </a:pPr>
+            <a:r>
+              <a:rPr sz="700" b="0">
+                <a:solidFill>
+                  <a:srgbClr val="555555"/>
+                </a:solidFill>
+              </a:rPr>
+              <a:t>APPROVED / REJECTED</a:t>
+            </a:r>
+          </a:p>
+        </p:txBody>
+      </p:sp>
+      <p:cxnSp>
+        <p:nvCxnSpPr>
+          <p:cNvPr id="49" name="Connector 48"/>
+          <p:cNvCxnSpPr/>
+          <p:nvPr/>
+        </p:nvCxnSpPr>
+        <p:spPr>
+          <a:xfrm>
+            <a:off x="6094476" y="6336792"/>
+            <a:ext cx="0" cy="128016"/>
+          </a:xfrm>
+          <a:prstGeom prst="line">
+            <a:avLst/>
+          </a:prstGeom>
+          <a:ln w="19050">
+            <a:solidFill>
+              <a:srgbClr val="888888"/>
+            </a:solidFill>
+            <a:tailEnd type="arrow" w="med" len="med"/>
+          </a:ln>
+        </p:spPr>
+        <p:style>
+          <a:lnRef idx="2">
+            <a:schemeClr val="accent1"/>
+          </a:lnRef>
+          <a:fillRef idx="0">
+            <a:schemeClr val="accent1"/>
+          </a:fillRef>
+          <a:effectRef idx="1">
+            <a:schemeClr val="accent1"/>
+          </a:effectRef>
+          <a:fontRef idx="minor">
+            <a:schemeClr val="tx1"/>
+          </a:fontRef>
+        </p:style>
+      </p:cxnSp>
+      <p:sp>
+        <p:nvSpPr>
+          <p:cNvPr id="50" name="Rounded Rectangle 49"/>
+          <p:cNvSpPr/>
+          <p:nvPr/>
+        </p:nvSpPr>
+        <p:spPr>
+          <a:xfrm>
+            <a:off x="699515" y="6492240"/>
+            <a:ext cx="3291840" cy="292608"/>
+          </a:xfrm>
+          <a:prstGeom prst="roundRect">
+            <a:avLst/>
+          </a:prstGeom>
+          <a:solidFill>
+            <a:srgbClr val="F2F3F4"/>
+          </a:solidFill>
+          <a:ln w="19050">
+            <a:solidFill>
+              <a:srgbClr val="95A5A6"/>
+            </a:solidFill>
+          </a:ln>
+        </p:spPr>
+        <p:style>
+          <a:lnRef idx="1">
+            <a:schemeClr val="accent1"/>
+          </a:lnRef>
+          <a:fillRef idx="3">
+            <a:schemeClr val="accent1"/>
+          </a:fillRef>
+          <a:effectRef idx="2">
+            <a:schemeClr val="accent1"/>
+          </a:effectRef>
+          <a:fontRef idx="minor">
+            <a:schemeClr val="lt1"/>
+          </a:fontRef>
+        </p:style>
+        <p:txBody>
+          <a:bodyPr rtlCol="0" anchor="ctr" wrap="square"/>
+          <a:lstStyle/>
+          <a:p>
+            <a:pPr algn="ctr">
+              <a:spcBef>
+                <a:spcPts val="100"/>
+              </a:spcBef>
+              <a:spcAft>
+                <a:spcPts val="100"/>
+              </a:spcAft>
+            </a:pPr>
+            <a:r>
+              <a:rPr sz="900" b="1">
+                <a:solidFill>
+                  <a:srgbClr val="1A1A2E"/>
+                </a:solidFill>
+              </a:rPr>
+              <a:t>검토 보고서</a:t>
+            </a:r>
+          </a:p>
+          <a:p>
+            <a:pPr algn="ctr">
+              <a:spcBef>
+                <a:spcPts val="100"/>
+              </a:spcBef>
+              <a:spcAft>
+                <a:spcPts val="100"/>
+              </a:spcAft>
+            </a:pPr>
+            <a:r>
+              <a:rPr sz="700" b="0">
+                <a:solidFill>
+                  <a:srgbClr val="555555"/>
+                </a:solidFill>
+              </a:rPr>
+              <a:t>사양확장표  (.xlsx)</a:t>
+            </a:r>
+          </a:p>
+        </p:txBody>
+      </p:sp>
+      <p:cxnSp>
+        <p:nvCxnSpPr>
+          <p:cNvPr id="51" name="Connector 50"/>
+          <p:cNvCxnSpPr/>
+          <p:nvPr/>
+        </p:nvCxnSpPr>
+        <p:spPr>
+          <a:xfrm>
+            <a:off x="3991356" y="6638544"/>
+            <a:ext cx="457200" cy="0"/>
+          </a:xfrm>
+          <a:prstGeom prst="line">
+            <a:avLst/>
+          </a:prstGeom>
+          <a:ln w="19050">
+            <a:solidFill>
+              <a:srgbClr val="888888"/>
+            </a:solidFill>
+            <a:tailEnd type="arrow" w="med" len="med"/>
+          </a:ln>
+        </p:spPr>
+        <p:style>
+          <a:lnRef idx="2">
+            <a:schemeClr val="accent1"/>
+          </a:lnRef>
+          <a:fillRef idx="0">
+            <a:schemeClr val="accent1"/>
+          </a:fillRef>
+          <a:effectRef idx="1">
+            <a:schemeClr val="accent1"/>
+          </a:effectRef>
+          <a:fontRef idx="minor">
+            <a:schemeClr val="tx1"/>
+          </a:fontRef>
+        </p:style>
+      </p:cxnSp>
+      <p:sp>
+        <p:nvSpPr>
+          <p:cNvPr id="52" name="Rounded Rectangle 51"/>
+          <p:cNvSpPr/>
+          <p:nvPr/>
+        </p:nvSpPr>
+        <p:spPr>
+          <a:xfrm>
+            <a:off x="4448555" y="6492240"/>
+            <a:ext cx="3291840" cy="292608"/>
+          </a:xfrm>
+          <a:prstGeom prst="roundRect">
+            <a:avLst/>
+          </a:prstGeom>
+          <a:solidFill>
+            <a:srgbClr val="F2F3F4"/>
+          </a:solidFill>
+          <a:ln w="19050">
+            <a:solidFill>
+              <a:srgbClr val="95A5A6"/>
+            </a:solidFill>
+          </a:ln>
+        </p:spPr>
+        <p:style>
+          <a:lnRef idx="1">
+            <a:schemeClr val="accent1"/>
+          </a:lnRef>
+          <a:fillRef idx="3">
+            <a:schemeClr val="accent1"/>
+          </a:fillRef>
+          <a:effectRef idx="2">
+            <a:schemeClr val="accent1"/>
+          </a:effectRef>
+          <a:fontRef idx="minor">
+            <a:schemeClr val="lt1"/>
+          </a:fontRef>
+        </p:style>
+        <p:txBody>
+          <a:bodyPr rtlCol="0" anchor="ctr" wrap="square"/>
+          <a:lstStyle/>
+          <a:p>
+            <a:pPr algn="ctr">
+              <a:spcBef>
+                <a:spcPts val="100"/>
+              </a:spcBef>
+              <a:spcAft>
+                <a:spcPts val="100"/>
+              </a:spcAft>
+            </a:pPr>
+            <a:r>
+              <a:rPr sz="900" b="1">
+                <a:solidFill>
+                  <a:srgbClr val="1A1A2E"/>
+                </a:solidFill>
+              </a:rPr>
+              <a:t>SQLite 로그</a:t>
+            </a:r>
+          </a:p>
+          <a:p>
+            <a:pPr algn="ctr">
+              <a:spcBef>
+                <a:spcPts val="100"/>
+              </a:spcBef>
+              <a:spcAft>
+                <a:spcPts val="100"/>
+              </a:spcAft>
+            </a:pPr>
+            <a:r>
+              <a:rPr sz="700" b="0">
+                <a:solidFill>
+                  <a:srgbClr val="555555"/>
+                </a:solidFill>
+              </a:rPr>
+              <a:t>단계별 판정 이력</a:t>
+            </a:r>
+          </a:p>
+        </p:txBody>
+      </p:sp>
+      <p:cxnSp>
+        <p:nvCxnSpPr>
+          <p:cNvPr id="53" name="Connector 52"/>
+          <p:cNvCxnSpPr/>
+          <p:nvPr/>
+        </p:nvCxnSpPr>
+        <p:spPr>
+          <a:xfrm>
+            <a:off x="7740396" y="6638544"/>
+            <a:ext cx="457200" cy="0"/>
+          </a:xfrm>
+          <a:prstGeom prst="line">
+            <a:avLst/>
+          </a:prstGeom>
+          <a:ln w="19050">
+            <a:solidFill>
+              <a:srgbClr val="888888"/>
+            </a:solidFill>
+            <a:tailEnd type="arrow" w="med" len="med"/>
+          </a:ln>
+        </p:spPr>
+        <p:style>
+          <a:lnRef idx="2">
+            <a:schemeClr val="accent1"/>
+          </a:lnRef>
+          <a:fillRef idx="0">
+            <a:schemeClr val="accent1"/>
+          </a:fillRef>
+          <a:effectRef idx="1">
+            <a:schemeClr val="accent1"/>
+          </a:effectRef>
+          <a:fontRef idx="minor">
+            <a:schemeClr val="tx1"/>
+          </a:fontRef>
+        </p:style>
+      </p:cxnSp>
+      <p:sp>
+        <p:nvSpPr>
+          <p:cNvPr id="54" name="Rounded Rectangle 53"/>
+          <p:cNvSpPr/>
+          <p:nvPr/>
+        </p:nvSpPr>
+        <p:spPr>
+          <a:xfrm>
+            <a:off x="8197596" y="6492240"/>
+            <a:ext cx="3291840" cy="292608"/>
+          </a:xfrm>
+          <a:prstGeom prst="roundRect">
+            <a:avLst/>
+          </a:prstGeom>
+          <a:solidFill>
+            <a:srgbClr val="D6EAF8"/>
+          </a:solidFill>
+          <a:ln w="19050">
+            <a:solidFill>
+              <a:srgbClr val="3498DB"/>
+            </a:solidFill>
+          </a:ln>
+        </p:spPr>
+        <p:style>
+          <a:lnRef idx="1">
+            <a:schemeClr val="accent1"/>
+          </a:lnRef>
+          <a:fillRef idx="3">
+            <a:schemeClr val="accent1"/>
+          </a:fillRef>
+          <a:effectRef idx="2">
+            <a:schemeClr val="accent1"/>
+          </a:effectRef>
+          <a:fontRef idx="minor">
+            <a:schemeClr val="lt1"/>
+          </a:fontRef>
+        </p:style>
+        <p:txBody>
+          <a:bodyPr rtlCol="0" anchor="ctr" wrap="square"/>
+          <a:lstStyle/>
+          <a:p>
+            <a:pPr algn="ctr">
+              <a:spcBef>
+                <a:spcPts val="100"/>
+              </a:spcBef>
+              <a:spcAft>
+                <a:spcPts val="100"/>
+              </a:spcAft>
+            </a:pPr>
+            <a:r>
+              <a:rPr sz="900" b="1">
+                <a:solidFill>
+                  <a:srgbClr val="1A1A2E"/>
+                </a:solidFill>
+              </a:rPr>
+              <a:t>UI 결과 표시</a:t>
+            </a:r>
+          </a:p>
+          <a:p>
+            <a:pPr algn="ctr">
+              <a:spcBef>
+                <a:spcPts val="100"/>
+              </a:spcBef>
+              <a:spcAft>
+                <a:spcPts val="100"/>
+              </a:spcAft>
+            </a:pPr>
+            <a:r>
+              <a:rPr sz="700" b="0">
+                <a:solidFill>
+                  <a:srgbClr val="555555"/>
+                </a:solidFill>
+              </a:rPr>
+              <a:t>판정 · 이유 · 사양 비교표</a:t>
+            </a:r>
+          </a:p>
+        </p:txBody>
+      </p:sp>
     </p:spTree>
   </p:cSld>
   <p:clrMapOvr>
